--- a/VC-2026-035-014_ProyectoFinal_EN.pptx
+++ b/VC-2026-035-014_ProyectoFinal_EN.pptx
@@ -116,7 +116,7 @@
   <p:extLst>
     <p:ext uri="{521415D9-36F7-43E2-AB2F-B90AF26B5E84}">
       <p14:sectionLst xmlns:p14="http://schemas.microsoft.com/office/powerpoint/2010/main">
-        <p14:section name="Part A · The tool" id="{809c5d3a-ce36-a781-fe04-2f909d394c43}">
+        <p14:section name="Part A · The tool" id="{2368a9a5-df68-38f4-296c-c6d9913d7b3b}">
           <p14:sldIdLst>
             <p14:sldId id="256"/>
             <p14:sldId id="257"/>
@@ -126,7 +126,7 @@
             <p14:sldId id="261"/>
           </p14:sldIdLst>
         </p14:section>
-        <p14:section name="Part B · Demonstration" id="{b3f722ed-51ac-bf15-35cc-00b1bc464cfd}">
+        <p14:section name="Part B · Demonstration" id="{0953eb67-d375-a3f4-28aa-f5bd026f0389}">
           <p14:sldIdLst>
             <p14:sldId id="262"/>
             <p14:sldId id="263"/>
@@ -539,7 +539,7 @@
             <a:r>
               <a:rPr lang="en-US" dirty="0"/>
               <a:t>Slide 1 · Cover · 15 s
-We present the Traceable Assistant for Scoping Reviews. We are Darwin Pillo, from P U C E Ibarra. And Julianna Montes de Oca, from U T E University. It extracts data from articles without losing where each value comes from.</a:t>
+We present the Traceable Assistant for Scoping Reviews. We are Darwin Pillo, from U T P L. And Julianna Montes de Oca, from U T E University. It extracts data from articles without losing where each value comes from.</a:t>
             </a:r>
             <a:endParaRPr lang="en-US" dirty="0"/>
           </a:p>
@@ -1466,7 +1466,7 @@
                   <a:schemeClr val="accent6"/>
                 </a:solidFill>
               </a:rPr>
-              <a:t>Vibe Coding CEDIA 2026 · Universidad UTE · PUCE Ibarra</a:t>
+              <a:t>Vibe Coding CEDIA 2026 · Universidad UTE · UTPL</a:t>
             </a:r>
             <a:endParaRPr lang="en-US" sz="1200" dirty="0"/>
           </a:p>
@@ -1615,7 +1615,7 @@
                   <a:schemeClr val="tx2"/>
                 </a:solidFill>
               </a:rPr>
-              <a:t>Vibe Coding CEDIA 2026 · Universidad UTE · PUCE Ibarra</a:t>
+              <a:t>Vibe Coding CEDIA 2026 · Universidad UTE · UTPL</a:t>
             </a:r>
             <a:endParaRPr lang="en-US" sz="1200" dirty="0"/>
           </a:p>
@@ -1806,7 +1806,7 @@
                   <a:schemeClr val="tx2"/>
                 </a:solidFill>
               </a:rPr>
-              <a:t>Vibe Coding CEDIA 2026 · Universidad UTE · PUCE Ibarra</a:t>
+              <a:t>Vibe Coding CEDIA 2026 · Universidad UTE · UTPL</a:t>
             </a:r>
             <a:endParaRPr lang="en-US" sz="1200" dirty="0"/>
           </a:p>
@@ -2443,7 +2443,7 @@
                   <a:srgbClr val="C9CEDB"/>
                 </a:solidFill>
               </a:rPr>
-              <a:t>  ·  PUCE Ibarra</a:t>
+              <a:t>  ·  UTPL</a:t>
             </a:r>
             <a:endParaRPr lang="en-US" sz="2200" dirty="0"/>
           </a:p>
@@ -3199,7 +3199,7 @@
                   <a:srgbClr val="C9CEDB"/>
                 </a:solidFill>
               </a:rPr>
-              <a:t>Darwin Pillo · PUCE Ibarra</a:t>
+              <a:t>Darwin Pillo · UTPL</a:t>
             </a:r>
             <a:endParaRPr lang="en-US" sz="2000" dirty="0"/>
           </a:p>
